--- a/docs/system_architecture.pptx
+++ b/docs/system_architecture.pptx
@@ -5270,7 +5270,7 @@
                 </a:solidFill>
                 <a:latin typeface="Meiryo UI"/>
               </a:rPr>
-              <a:t>因子ボックス検出 → 青/赤/緑/白 + ★数 + character 逆引き</a:t>
+              <a:t>★検出駆動 bbox + CNN 分類器(gold/empty) + 赤 allowlist OCR + character 逆引き</a:t>
             </a:r>
           </a:p>
         </p:txBody>
@@ -8394,7 +8394,7 @@
                 </a:solidFill>
                 <a:latin typeface="Meiryo UI"/>
               </a:rPr>
-              <a:t>Cloud Run 300 秒制限。コールドスタート 30〜60s + 解析 30〜60s を想定</a:t>
+              <a:t>Cloud Run 300 秒制限。CNN 追加でコールドスタート込み 150s / warm 100s 前後</a:t>
             </a:r>
           </a:p>
         </p:txBody>
